--- a/Presentations/Video.pptx
+++ b/Presentations/Video.pptx
@@ -5,7 +5,7 @@
     <p:sldMasterId id="2147483648" r:id="rId1"/>
   </p:sldMasterIdLst>
   <p:notesMasterIdLst>
-    <p:notesMasterId r:id="rId7"/>
+    <p:notesMasterId r:id="rId8"/>
   </p:notesMasterIdLst>
   <p:sldIdLst>
     <p:sldId id="256" r:id="rId2"/>
@@ -13,6 +13,7 @@
     <p:sldId id="258" r:id="rId4"/>
     <p:sldId id="260" r:id="rId5"/>
     <p:sldId id="259" r:id="rId6"/>
+    <p:sldId id="261" r:id="rId7"/>
   </p:sldIdLst>
   <p:sldSz cx="12192000" cy="6858000"/>
   <p:notesSz cx="6858000" cy="9144000"/>
@@ -889,8 +890,8 @@
               <a:t>cordova</a:t>
             </a:r>
             <a:r>
-              <a:rPr lang="en-US"/>
-              <a:t> and .NET MAUI</a:t>
+              <a:rPr lang="en-US" dirty="0"/>
+              <a:t> and .NET MAUI. APKs are split per architecture and </a:t>
             </a:r>
           </a:p>
           <a:p>
@@ -980,7 +981,7 @@
           <a:p>
             <a:r>
               <a:rPr lang="en-US" dirty="0"/>
-              <a:t>The dataset has been compiled directly from source code, which was crawled directly from open-source GitHub repositories. The source code is then analyzed and finally built using a custom build orchestrator.</a:t>
+              <a:t>The dataset has been compiled directly from source code, which was crawled directly from open-source GitHub repositories. The source code is first analyzed and then built using a custom build orchestrator.</a:t>
             </a:r>
           </a:p>
           <a:p>
@@ -1021,6 +1022,90 @@
     <p:extLst>
       <p:ext uri="{BB962C8B-B14F-4D97-AF65-F5344CB8AC3E}">
         <p14:creationId xmlns:p14="http://schemas.microsoft.com/office/powerpoint/2010/main" val="3232731490"/>
+      </p:ext>
+    </p:extLst>
+  </p:cSld>
+  <p:clrMapOvr>
+    <a:masterClrMapping/>
+  </p:clrMapOvr>
+</p:notes>
+</file>
+
+<file path=ppt/notesSlides/notesSlide6.xml><?xml version="1.0" encoding="utf-8"?>
+<p:notes xmlns:a="http://schemas.openxmlformats.org/drawingml/2006/main" xmlns:r="http://schemas.openxmlformats.org/officeDocument/2006/relationships" xmlns:p="http://schemas.openxmlformats.org/presentationml/2006/main">
+  <p:cSld>
+    <p:spTree>
+      <p:nvGrpSpPr>
+        <p:cNvPr id="1" name=""/>
+        <p:cNvGrpSpPr/>
+        <p:nvPr/>
+      </p:nvGrpSpPr>
+      <p:grpSpPr>
+        <a:xfrm>
+          <a:off x="0" y="0"/>
+          <a:ext cx="0" cy="0"/>
+          <a:chOff x="0" y="0"/>
+          <a:chExt cx="0" cy="0"/>
+        </a:xfrm>
+      </p:grpSpPr>
+      <p:sp>
+        <p:nvSpPr>
+          <p:cNvPr id="2" name="Folienbildplatzhalter 1"/>
+          <p:cNvSpPr>
+            <a:spLocks noGrp="1" noRot="1" noChangeAspect="1"/>
+          </p:cNvSpPr>
+          <p:nvPr>
+            <p:ph type="sldImg"/>
+          </p:nvPr>
+        </p:nvSpPr>
+        <p:spPr/>
+      </p:sp>
+      <p:sp>
+        <p:nvSpPr>
+          <p:cNvPr id="3" name="Notizenplatzhalter 2"/>
+          <p:cNvSpPr>
+            <a:spLocks noGrp="1"/>
+          </p:cNvSpPr>
+          <p:nvPr>
+            <p:ph type="body" idx="1"/>
+          </p:nvPr>
+        </p:nvSpPr>
+        <p:spPr/>
+        <p:txBody>
+          <a:bodyPr/>
+          <a:lstStyle/>
+          <a:p>
+            <a:endParaRPr lang="en-US" dirty="0"/>
+          </a:p>
+        </p:txBody>
+      </p:sp>
+      <p:sp>
+        <p:nvSpPr>
+          <p:cNvPr id="4" name="Foliennummernplatzhalter 3"/>
+          <p:cNvSpPr>
+            <a:spLocks noGrp="1"/>
+          </p:cNvSpPr>
+          <p:nvPr>
+            <p:ph type="sldNum" sz="quarter" idx="5"/>
+          </p:nvPr>
+        </p:nvSpPr>
+        <p:spPr/>
+        <p:txBody>
+          <a:bodyPr/>
+          <a:lstStyle/>
+          <a:p>
+            <a:fld id="{2A1FD8E7-1833-4BB3-A8B9-0A9D1F585605}" type="slidenum">
+              <a:rPr lang="en-US" smtClean="0"/>
+              <a:t>6</a:t>
+            </a:fld>
+            <a:endParaRPr lang="en-US"/>
+          </a:p>
+        </p:txBody>
+      </p:sp>
+    </p:spTree>
+    <p:extLst>
+      <p:ext uri="{BB962C8B-B14F-4D97-AF65-F5344CB8AC3E}">
+        <p14:creationId xmlns:p14="http://schemas.microsoft.com/office/powerpoint/2010/main" val="1801573395"/>
       </p:ext>
     </p:extLst>
   </p:cSld>
@@ -4852,6 +4937,89 @@
     <p:extLst>
       <p:ext uri="{BB962C8B-B14F-4D97-AF65-F5344CB8AC3E}">
         <p14:creationId xmlns:p14="http://schemas.microsoft.com/office/powerpoint/2010/main" val="3402180164"/>
+      </p:ext>
+    </p:extLst>
+  </p:cSld>
+  <p:clrMapOvr>
+    <a:masterClrMapping/>
+  </p:clrMapOvr>
+</p:sld>
+</file>
+
+<file path=ppt/slides/slide6.xml><?xml version="1.0" encoding="utf-8"?>
+<p:sld xmlns:a="http://schemas.openxmlformats.org/drawingml/2006/main" xmlns:r="http://schemas.openxmlformats.org/officeDocument/2006/relationships" xmlns:p="http://schemas.openxmlformats.org/presentationml/2006/main">
+  <p:cSld>
+    <p:spTree>
+      <p:nvGrpSpPr>
+        <p:cNvPr id="1" name=""/>
+        <p:cNvGrpSpPr/>
+        <p:nvPr/>
+      </p:nvGrpSpPr>
+      <p:grpSpPr>
+        <a:xfrm>
+          <a:off x="0" y="0"/>
+          <a:ext cx="0" cy="0"/>
+          <a:chOff x="0" y="0"/>
+          <a:chExt cx="0" cy="0"/>
+        </a:xfrm>
+      </p:grpSpPr>
+      <p:sp>
+        <p:nvSpPr>
+          <p:cNvPr id="2" name="Titel 1">
+            <a:extLst>
+              <a:ext uri="{FF2B5EF4-FFF2-40B4-BE49-F238E27FC236}">
+                <a16:creationId xmlns:a16="http://schemas.microsoft.com/office/drawing/2014/main" id="{929208CC-0E37-069F-1DE8-BDAAB0DB905D}"/>
+              </a:ext>
+            </a:extLst>
+          </p:cNvPr>
+          <p:cNvSpPr>
+            <a:spLocks noGrp="1"/>
+          </p:cNvSpPr>
+          <p:nvPr>
+            <p:ph type="title"/>
+          </p:nvPr>
+        </p:nvSpPr>
+        <p:spPr/>
+        <p:txBody>
+          <a:bodyPr/>
+          <a:lstStyle/>
+          <a:p>
+            <a:r>
+              <a:rPr lang="en-US" dirty="0"/>
+              <a:t>{show tool not working}</a:t>
+            </a:r>
+          </a:p>
+        </p:txBody>
+      </p:sp>
+      <p:sp>
+        <p:nvSpPr>
+          <p:cNvPr id="3" name="Inhaltsplatzhalter 2">
+            <a:extLst>
+              <a:ext uri="{FF2B5EF4-FFF2-40B4-BE49-F238E27FC236}">
+                <a16:creationId xmlns:a16="http://schemas.microsoft.com/office/drawing/2014/main" id="{C0DDFE3E-0A81-13F7-7E30-4C1CAD227734}"/>
+              </a:ext>
+            </a:extLst>
+          </p:cNvPr>
+          <p:cNvSpPr>
+            <a:spLocks noGrp="1"/>
+          </p:cNvSpPr>
+          <p:nvPr>
+            <p:ph idx="1"/>
+          </p:nvPr>
+        </p:nvSpPr>
+        <p:spPr/>
+        <p:txBody>
+          <a:bodyPr/>
+          <a:lstStyle/>
+          <a:p>
+            <a:endParaRPr lang="en-US"/>
+          </a:p>
+        </p:txBody>
+      </p:sp>
+    </p:spTree>
+    <p:extLst>
+      <p:ext uri="{BB962C8B-B14F-4D97-AF65-F5344CB8AC3E}">
+        <p14:creationId xmlns:p14="http://schemas.microsoft.com/office/powerpoint/2010/main" val="1580707161"/>
       </p:ext>
     </p:extLst>
   </p:cSld>

--- a/Presentations/Video.pptx
+++ b/Presentations/Video.pptx
@@ -112,6 +112,11 @@
       </a:defRPr>
     </a:lvl9pPr>
   </p:defaultTextStyle>
+  <p:extLst>
+    <p:ext uri="{EFAFB233-063F-42B5-8137-9DF3F51BA10A}">
+      <p15:sldGuideLst xmlns:p15="http://schemas.microsoft.com/office/powerpoint/2012/main"/>
+    </p:ext>
+  </p:extLst>
 </p:presentation>
 </file>
 
@@ -197,7 +202,7 @@
           <a:p>
             <a:fld id="{0208CF69-35A8-4DEA-BA49-9C4D5F5D8802}" type="datetimeFigureOut">
               <a:rPr lang="en-US" smtClean="0"/>
-              <a:t>10/11/2026</a:t>
+              <a:t>10/15/2026</a:t>
             </a:fld>
             <a:endParaRPr lang="en-US"/>
           </a:p>
@@ -721,7 +726,7 @@
             </a:r>
             <a:r>
               <a:rPr lang="en-US" dirty="0"/>
-              <a:t> files. However, up to this day, tools offering TPL detection are not very accurate, and what weighs more, do not work for non-native apps.</a:t>
+              <a:t> files. However, up to this day, tools offering TPL detection are not very accurate, and what weighs more, do not actively support non-native apps.</a:t>
             </a:r>
           </a:p>
           <a:p>
@@ -743,7 +748,7 @@
             </a:r>
             <a:r>
               <a:rPr lang="en-US" dirty="0"/>
-              <a:t> framework, that allows cross-compilation for windows, macOS, iOS, android and more. However, all existing TPL detection tools are only developed for apps using native java or Kotlin. </a:t>
+              <a:t> framework, that allows cross-compilation for windows, macOS, iOS, android and more. All existing TPL detection tools are only developed for apps using native java or Kotlin. </a:t>
             </a:r>
           </a:p>
           <a:p>
@@ -1264,7 +1269,7 @@
           <a:p>
             <a:fld id="{2AA0FF22-0FA2-4ADF-BBB3-50C50C18132F}" type="datetimeFigureOut">
               <a:rPr lang="en-US" smtClean="0"/>
-              <a:t>10/11/2026</a:t>
+              <a:t>10/15/2026</a:t>
             </a:fld>
             <a:endParaRPr lang="en-US"/>
           </a:p>
@@ -1464,7 +1469,7 @@
           <a:p>
             <a:fld id="{2AA0FF22-0FA2-4ADF-BBB3-50C50C18132F}" type="datetimeFigureOut">
               <a:rPr lang="en-US" smtClean="0"/>
-              <a:t>10/11/2026</a:t>
+              <a:t>10/15/2026</a:t>
             </a:fld>
             <a:endParaRPr lang="en-US"/>
           </a:p>
@@ -1674,7 +1679,7 @@
           <a:p>
             <a:fld id="{2AA0FF22-0FA2-4ADF-BBB3-50C50C18132F}" type="datetimeFigureOut">
               <a:rPr lang="en-US" smtClean="0"/>
-              <a:t>10/11/2026</a:t>
+              <a:t>10/15/2026</a:t>
             </a:fld>
             <a:endParaRPr lang="en-US"/>
           </a:p>
@@ -1874,7 +1879,7 @@
           <a:p>
             <a:fld id="{2AA0FF22-0FA2-4ADF-BBB3-50C50C18132F}" type="datetimeFigureOut">
               <a:rPr lang="en-US" smtClean="0"/>
-              <a:t>10/11/2026</a:t>
+              <a:t>10/15/2026</a:t>
             </a:fld>
             <a:endParaRPr lang="en-US"/>
           </a:p>
@@ -2150,7 +2155,7 @@
           <a:p>
             <a:fld id="{2AA0FF22-0FA2-4ADF-BBB3-50C50C18132F}" type="datetimeFigureOut">
               <a:rPr lang="en-US" smtClean="0"/>
-              <a:t>10/11/2026</a:t>
+              <a:t>10/15/2026</a:t>
             </a:fld>
             <a:endParaRPr lang="en-US"/>
           </a:p>
@@ -2418,7 +2423,7 @@
           <a:p>
             <a:fld id="{2AA0FF22-0FA2-4ADF-BBB3-50C50C18132F}" type="datetimeFigureOut">
               <a:rPr lang="en-US" smtClean="0"/>
-              <a:t>10/11/2026</a:t>
+              <a:t>10/15/2026</a:t>
             </a:fld>
             <a:endParaRPr lang="en-US"/>
           </a:p>
@@ -2833,7 +2838,7 @@
           <a:p>
             <a:fld id="{2AA0FF22-0FA2-4ADF-BBB3-50C50C18132F}" type="datetimeFigureOut">
               <a:rPr lang="en-US" smtClean="0"/>
-              <a:t>10/11/2026</a:t>
+              <a:t>10/15/2026</a:t>
             </a:fld>
             <a:endParaRPr lang="en-US"/>
           </a:p>
@@ -2975,7 +2980,7 @@
           <a:p>
             <a:fld id="{2AA0FF22-0FA2-4ADF-BBB3-50C50C18132F}" type="datetimeFigureOut">
               <a:rPr lang="en-US" smtClean="0"/>
-              <a:t>10/11/2026</a:t>
+              <a:t>10/15/2026</a:t>
             </a:fld>
             <a:endParaRPr lang="en-US"/>
           </a:p>
@@ -3088,7 +3093,7 @@
           <a:p>
             <a:fld id="{2AA0FF22-0FA2-4ADF-BBB3-50C50C18132F}" type="datetimeFigureOut">
               <a:rPr lang="en-US" smtClean="0"/>
-              <a:t>10/11/2026</a:t>
+              <a:t>10/15/2026</a:t>
             </a:fld>
             <a:endParaRPr lang="en-US"/>
           </a:p>
@@ -3401,7 +3406,7 @@
           <a:p>
             <a:fld id="{2AA0FF22-0FA2-4ADF-BBB3-50C50C18132F}" type="datetimeFigureOut">
               <a:rPr lang="en-US" smtClean="0"/>
-              <a:t>10/11/2026</a:t>
+              <a:t>10/15/2026</a:t>
             </a:fld>
             <a:endParaRPr lang="en-US"/>
           </a:p>
@@ -3690,7 +3695,7 @@
           <a:p>
             <a:fld id="{2AA0FF22-0FA2-4ADF-BBB3-50C50C18132F}" type="datetimeFigureOut">
               <a:rPr lang="en-US" smtClean="0"/>
-              <a:t>10/11/2026</a:t>
+              <a:t>10/15/2026</a:t>
             </a:fld>
             <a:endParaRPr lang="en-US"/>
           </a:p>
@@ -3933,7 +3938,7 @@
           <a:p>
             <a:fld id="{2AA0FF22-0FA2-4ADF-BBB3-50C50C18132F}" type="datetimeFigureOut">
               <a:rPr lang="en-US" smtClean="0"/>
-              <a:t>10/11/2026</a:t>
+              <a:t>10/15/2026</a:t>
             </a:fld>
             <a:endParaRPr lang="en-US"/>
           </a:p>
@@ -4984,35 +4989,52 @@
           <a:bodyPr/>
           <a:lstStyle/>
           <a:p>
-            <a:r>
-              <a:rPr lang="en-US" dirty="0"/>
-              <a:t>{show tool not working}</a:t>
-            </a:r>
-          </a:p>
-        </p:txBody>
-      </p:sp>
-      <p:sp>
-        <p:nvSpPr>
-          <p:cNvPr id="3" name="Inhaltsplatzhalter 2">
-            <a:extLst>
-              <a:ext uri="{FF2B5EF4-FFF2-40B4-BE49-F238E27FC236}">
-                <a16:creationId xmlns:a16="http://schemas.microsoft.com/office/drawing/2014/main" id="{C0DDFE3E-0A81-13F7-7E30-4C1CAD227734}"/>
-              </a:ext>
-            </a:extLst>
-          </p:cNvPr>
-          <p:cNvSpPr>
+            <a:endParaRPr lang="en-US" dirty="0"/>
+          </a:p>
+        </p:txBody>
+      </p:sp>
+      <p:sp>
+        <p:nvSpPr>
+          <p:cNvPr id="7" name="Inhaltsplatzhalter 6">
+            <a:extLst>
+              <a:ext uri="{FF2B5EF4-FFF2-40B4-BE49-F238E27FC236}">
+                <a16:creationId xmlns:a16="http://schemas.microsoft.com/office/drawing/2014/main" id="{66CCE29F-50E2-29D2-D6AF-3672C88BDF2D}"/>
+              </a:ext>
+            </a:extLst>
+          </p:cNvPr>
+          <p:cNvSpPr txBox="1">
             <a:spLocks noGrp="1"/>
           </p:cNvSpPr>
           <p:nvPr>
             <p:ph idx="1"/>
           </p:nvPr>
         </p:nvSpPr>
-        <p:spPr/>
-        <p:txBody>
-          <a:bodyPr/>
-          <a:lstStyle/>
-          <a:p>
-            <a:endParaRPr lang="en-US"/>
+        <p:spPr>
+          <a:xfrm>
+            <a:off x="838200" y="1825625"/>
+            <a:ext cx="10515600" cy="1886157"/>
+          </a:xfrm>
+          <a:prstGeom prst="rect">
+            <a:avLst/>
+          </a:prstGeom>
+          <a:noFill/>
+        </p:spPr>
+        <p:txBody>
+          <a:bodyPr wrap="square">
+            <a:spAutoFit/>
+          </a:bodyPr>
+          <a:lstStyle/>
+          <a:p>
+            <a:r>
+              <a:rPr lang="de-CH" sz="4000" dirty="0"/>
+              <a:t>Website: https://x-tpl.github.io</a:t>
+            </a:r>
+          </a:p>
+          <a:p>
+            <a:r>
+              <a:rPr lang="de-CH" sz="4000" dirty="0"/>
+              <a:t>Dataset: https://vault.cloudlab.zhaw.ch/vault-data/x-tpl</a:t>
+            </a:r>
           </a:p>
         </p:txBody>
       </p:sp>
